--- a/Visualisation and Flyer/NESO trifold leaflet v1.pptx
+++ b/Visualisation and Flyer/NESO trifold leaflet v1.pptx
@@ -111,6 +111,43 @@
     </p:ext>
   </p:extLst>
 </p:presentation>
+</file>
+
+<file path=ppt/revisionInfo.xml><?xml version="1.0" encoding="utf-8"?>
+<p1510:revInfo xmlns:a="http://schemas.openxmlformats.org/drawingml/2006/main" xmlns:r="http://schemas.openxmlformats.org/officeDocument/2006/relationships" xmlns:p1510="http://schemas.microsoft.com/office/powerpoint/2015/10/main">
+  <p1510:revLst>
+    <p1510:client id="{4F56EBE4-2B35-4232-88D9-3DCBD274759A}" v="1" dt="2026-06-02T14:01:47.114"/>
+  </p1510:revLst>
+</p1510:revInfo>
+</file>
+
+<file path=ppt/changesInfos/changesInfo1.xml><?xml version="1.0" encoding="utf-8"?>
+<pc:chgInfo xmlns:a="http://schemas.openxmlformats.org/drawingml/2006/main" xmlns:r="http://schemas.openxmlformats.org/officeDocument/2006/relationships" xmlns:ac="http://schemas.microsoft.com/office/drawing/2013/main/command" xmlns:pc="http://schemas.microsoft.com/office/powerpoint/2013/main/command">
+  <pc:docChgLst>
+    <pc:chgData name="雅涵 杨" userId="a58d5ad1ceb2b0d3" providerId="LiveId" clId="{D49BA7B0-73E7-4C6C-BD9C-906FD4FBACE8}"/>
+    <pc:docChg chg="modSld">
+      <pc:chgData name="雅涵 杨" userId="a58d5ad1ceb2b0d3" providerId="LiveId" clId="{D49BA7B0-73E7-4C6C-BD9C-906FD4FBACE8}" dt="2026-06-02T14:01:49.091" v="11" actId="20577"/>
+      <pc:docMkLst>
+        <pc:docMk/>
+      </pc:docMkLst>
+      <pc:sldChg chg="modSp mod">
+        <pc:chgData name="雅涵 杨" userId="a58d5ad1ceb2b0d3" providerId="LiveId" clId="{D49BA7B0-73E7-4C6C-BD9C-906FD4FBACE8}" dt="2026-06-02T14:01:49.091" v="11" actId="20577"/>
+        <pc:sldMkLst>
+          <pc:docMk/>
+          <pc:sldMk cId="0" sldId="256"/>
+        </pc:sldMkLst>
+        <pc:spChg chg="mod">
+          <ac:chgData name="雅涵 杨" userId="a58d5ad1ceb2b0d3" providerId="LiveId" clId="{D49BA7B0-73E7-4C6C-BD9C-906FD4FBACE8}" dt="2026-06-02T14:01:49.091" v="11" actId="20577"/>
+          <ac:spMkLst>
+            <pc:docMk/>
+            <pc:sldMk cId="0" sldId="256"/>
+            <ac:spMk id="52" creationId="{00000000-0000-0000-0000-000000000000}"/>
+          </ac:spMkLst>
+        </pc:spChg>
+      </pc:sldChg>
+    </pc:docChg>
+  </pc:docChgLst>
+</pc:chgInfo>
 </file>
 
 <file path=ppt/notesMasters/notesMaster1.xml><?xml version="1.0" encoding="utf-8"?>
@@ -2636,16 +2673,13 @@
           <a:bodyPr wrap="square" lIns="0" tIns="0" rIns="0" bIns="0" rtlCol="0" anchor="ctr"/>
           <a:lstStyle/>
           <a:p>
-            <a:pPr marL="0" indent="0">
-              <a:buNone/>
-            </a:pPr>
             <a:r>
               <a:rPr lang="en-US" sz="1000" b="1" dirty="0">
                 <a:solidFill>
                   <a:srgbClr val="0D2B1F"/>
                 </a:solidFill>
               </a:rPr>
-              <a:t>Bialek Tracing</a:t>
+              <a:t>Tracing by Bialek method</a:t>
             </a:r>
             <a:endParaRPr lang="en-US" sz="1000" dirty="0"/>
           </a:p>
